--- a/assets/pptx/catalog-146.pptx
+++ b/assets/pptx/catalog-146.pptx
@@ -3256,7 +3256,7 @@
                 <a:ea typeface="Ebrima"/>
                 <a:cs typeface="Ebrima"/>
               </a:rPr>
-              <a:t>ከልቤ ነው ከልቤ አይደለም በከንፈሬ (2x)</a:t>
+              <a:t>ከልቤ ነው ከልቤ አይደለም በከንፈሬ 2x</a:t>
             </a:r>
           </a:p>
         </p:txBody>
@@ -3390,7 +3390,7 @@
                 <a:ea typeface="Ebrima"/>
                 <a:cs typeface="Ebrima"/>
               </a:rPr>
-              <a:t>ከልቤ ነው ከልቤ አይደለም በከንፈሬ (2x)</a:t>
+              <a:t>ከልቤ ነው ከልቤ አይደለም በከንፈሬ 2x</a:t>
             </a:r>
           </a:p>
         </p:txBody>
@@ -3457,7 +3457,7 @@
                 <a:ea typeface="Ebrima"/>
                 <a:cs typeface="Ebrima"/>
               </a:rPr>
-              <a:t>ክበር ይላሉ ንገሥ ይላሉ በሰማይ ያሉ በምድር ያሉ ሲሉህ ሰምቼ ልልህ ቆምኩኝ እኔም የራሴ ምሥጋና አለኝ (2x)</a:t>
+              <a:t>ክበር ይላሉ ንገሥ ይላሉ በሰማይ ያሉ በምድር ያሉ ሲሉህ ሰምቼ ልልህ ቆምኩኝ እኔም የራሴ ምሥጋና አለኝ 2x</a:t>
             </a:r>
           </a:p>
         </p:txBody>
@@ -3725,7 +3725,7 @@
                 <a:ea typeface="Ebrima"/>
                 <a:cs typeface="Ebrima"/>
               </a:rPr>
-              <a:t>አለኝ አድናቆት አለኝ (2x)</a:t>
+              <a:t>አለኝ አድናቆት አለኝ 2x</a:t>
             </a:r>
           </a:p>
         </p:txBody>
@@ -3792,7 +3792,7 @@
                 <a:ea typeface="Ebrima"/>
                 <a:cs typeface="Ebrima"/>
               </a:rPr>
-              <a:t>ገንኖ ገንኖ ስምህ መውጣቱ ፍጥረት ሁሉ ስላንተ ማውራቱ ከፍታ ላይ አለመድረሱ ይሄ ሁሉ ማዕረጉ ልክ ነው አይበዛብህ እንዲያውም ስያንስብህ (3x)</a:t>
+              <a:t>ገንኖ ገንኖ ስምህ መውጣቱ ፍጥረት ሁሉ ስላንተ ማውራቱ ከፍታ ላይ አለመድረሱ ይሄ ሁሉ ማዕረጉ ልክ ነው አይበዛብህ እንዲያውም ስያንስብህ 3x</a:t>
             </a:r>
           </a:p>
         </p:txBody>
@@ -3993,7 +3993,7 @@
                 <a:ea typeface="Ebrima"/>
                 <a:cs typeface="Ebrima"/>
               </a:rPr>
-              <a:t>ማን ብሎህ ክቡር ሆንክ ማን ሾሞህ ነገሥህ (2x)</a:t>
+              <a:t>ማን ብሎህ ክቡር ሆንክ ማን ሾሞህ ነገሥህ 2x</a:t>
             </a:r>
           </a:p>
         </p:txBody>
@@ -4060,7 +4060,7 @@
                 <a:ea typeface="Ebrima"/>
                 <a:cs typeface="Ebrima"/>
               </a:rPr>
-              <a:t>አንተ እራስህ ክቡር ነህ (2x) አንተ እራስህ ንጉስ ነህ (2x) እራስህ አንተ እራስህ ክቡር ነህ እራስህ አንተ እራስህ ንጉሥ ነህ</a:t>
+              <a:t>አንተ እራስህ ክቡር ነህ 2x አንተ እራስህ ንጉስ ነህ 2x እራስህ አንተ እራስህ ክቡር ነህ እራስህ አንተ እራስህ ንጉሥ ነህ</a:t>
             </a:r>
           </a:p>
         </p:txBody>
@@ -4194,7 +4194,7 @@
                 <a:ea typeface="Ebrima"/>
                 <a:cs typeface="Ebrima"/>
               </a:rPr>
-              <a:t>ስለገረመኝ ብቻ እንዲህ ነህ እልሃለሁ (2x)</a:t>
+              <a:t>ስለገረመኝ ብቻ እንዲህ ነህ እልሃለሁ 2x</a:t>
             </a:r>
           </a:p>
         </p:txBody>
